--- a/textbook/ppt/chapter01_ppt.pptx
+++ b/textbook/ppt/chapter01_ppt.pptx
@@ -7,6 +7,12 @@
   <p:sldIdLst>
     <p:sldId id="256" r:id="rId7"/>
     <p:sldId id="257" r:id="rId8"/>
+    <p:sldId id="258" r:id="rId9"/>
+    <p:sldId id="259" r:id="rId10"/>
+    <p:sldId id="260" r:id="rId11"/>
+    <p:sldId id="261" r:id="rId12"/>
+    <p:sldId id="262" r:id="rId13"/>
+    <p:sldId id="263" r:id="rId14"/>
   </p:sldIdLst>
   <p:sldSz cx="12188952" cy="6858000" type="screen4x3"/>
   <p:notesSz cx="6858000" cy="9144000"/>
@@ -3235,6 +3241,629 @@
             <a:r>
               <a:rPr sz="1800"/>
               <a:t>• Python 的 input/print的基本概念与应用</a:t>
+            </a:r>
+          </a:p>
+        </p:txBody>
+      </p:sp>
+    </p:spTree>
+  </p:cSld>
+  <p:clrMapOvr>
+    <a:masterClrMapping/>
+  </p:clrMapOvr>
+</p:sld>
+</file>
+
+<file path=ppt/slides/slide3.xml><?xml version="1.0" encoding="utf-8"?>
+<p:sld xmlns:a="http://schemas.openxmlformats.org/drawingml/2006/main" xmlns:p="http://schemas.openxmlformats.org/presentationml/2006/main" xmlns:r="http://schemas.openxmlformats.org/officeDocument/2006/relationships">
+  <p:cSld>
+    <p:spTree>
+      <p:nvGrpSpPr>
+        <p:cNvPr id="1" name=""/>
+        <p:cNvGrpSpPr/>
+        <p:nvPr/>
+      </p:nvGrpSpPr>
+      <p:grpSpPr/>
+      <p:sp>
+        <p:nvSpPr>
+          <p:cNvPr id="2" name="TextBox 1"/>
+          <p:cNvSpPr txBox="1"/>
+          <p:nvPr/>
+        </p:nvSpPr>
+        <p:spPr>
+          <a:xfrm>
+            <a:off x="914400" y="457200"/>
+            <a:ext cx="10058400" cy="914400"/>
+          </a:xfrm>
+          <a:prstGeom prst="rect">
+            <a:avLst/>
+          </a:prstGeom>
+          <a:noFill/>
+        </p:spPr>
+        <p:txBody>
+          <a:bodyPr wrap="none">
+            <a:spAutoFit/>
+          </a:bodyPr>
+          <a:lstStyle/>
+          <a:p>
+            <a:r>
+              <a:rPr sz="2800" b="1">
+                <a:solidFill>
+                  <a:srgbClr val="8B0000"/>
+                </a:solidFill>
+              </a:rPr>
+              <a:t>本章概览</a:t>
+            </a:r>
+          </a:p>
+        </p:txBody>
+      </p:sp>
+      <p:sp>
+        <p:nvSpPr>
+          <p:cNvPr id="3" name="TextBox 2"/>
+          <p:cNvSpPr txBox="1"/>
+          <p:nvPr/>
+        </p:nvSpPr>
+        <p:spPr>
+          <a:xfrm>
+            <a:off x="914400" y="1371600"/>
+            <a:ext cx="10058400" cy="5029200"/>
+          </a:xfrm>
+          <a:prstGeom prst="rect">
+            <a:avLst/>
+          </a:prstGeom>
+          <a:noFill/>
+        </p:spPr>
+        <p:txBody>
+          <a:bodyPr wrap="none">
+            <a:spAutoFit/>
+          </a:bodyPr>
+          <a:lstStyle/>
+          <a:p/>
+          <a:p>
+            <a:r>
+              <a:rPr sz="1600">
+                <a:solidFill>
+                  <a:srgbClr val="000000"/>
+                </a:solidFill>
+              </a:rPr>
+              <a:t>变量 = 盒子，int装整数，double装小数</a:t>
+            </a:r>
+          </a:p>
+          <a:p>
+            <a:r>
+              <a:rPr sz="1600">
+                <a:solidFill>
+                  <a:srgbClr val="000000"/>
+                </a:solidFill>
+              </a:rPr>
+              <a:t>#include = 工具箱，using namespace std = 快捷方式</a:t>
+            </a:r>
+          </a:p>
+          <a:p>
+            <a:r>
+              <a:rPr sz="1600">
+                <a:solidFill>
+                  <a:srgbClr val="000000"/>
+                </a:solidFill>
+              </a:rPr>
+              <a:t>cin/cout 是C++的输入输出</a:t>
+            </a:r>
+          </a:p>
+          <a:p>
+            <a:r>
+              <a:rPr sz="1600">
+                <a:solidFill>
+                  <a:srgbClr val="000000"/>
+                </a:solidFill>
+              </a:rPr>
+              <a:t>input()/print() 是Python的输入输出</a:t>
+            </a:r>
+          </a:p>
+        </p:txBody>
+      </p:sp>
+    </p:spTree>
+  </p:cSld>
+  <p:clrMapOvr>
+    <a:masterClrMapping/>
+  </p:clrMapOvr>
+</p:sld>
+</file>
+
+<file path=ppt/slides/slide4.xml><?xml version="1.0" encoding="utf-8"?>
+<p:sld xmlns:a="http://schemas.openxmlformats.org/drawingml/2006/main" xmlns:p="http://schemas.openxmlformats.org/presentationml/2006/main" xmlns:r="http://schemas.openxmlformats.org/officeDocument/2006/relationships">
+  <p:cSld>
+    <p:spTree>
+      <p:nvGrpSpPr>
+        <p:cNvPr id="1" name=""/>
+        <p:cNvGrpSpPr/>
+        <p:nvPr/>
+      </p:nvGrpSpPr>
+      <p:grpSpPr/>
+      <p:sp>
+        <p:nvSpPr>
+          <p:cNvPr id="2" name="TextBox 1"/>
+          <p:cNvSpPr txBox="1"/>
+          <p:nvPr/>
+        </p:nvSpPr>
+        <p:spPr>
+          <a:xfrm>
+            <a:off x="914400" y="457200"/>
+            <a:ext cx="10058400" cy="914400"/>
+          </a:xfrm>
+          <a:prstGeom prst="rect">
+            <a:avLst/>
+          </a:prstGeom>
+          <a:noFill/>
+        </p:spPr>
+        <p:txBody>
+          <a:bodyPr wrap="none">
+            <a:spAutoFit/>
+          </a:bodyPr>
+          <a:lstStyle/>
+          <a:p>
+            <a:r>
+              <a:rPr sz="2800" b="1">
+                <a:solidFill>
+                  <a:srgbClr val="8B0000"/>
+                </a:solidFill>
+              </a:rPr>
+              <a:t>C++ 代码示例</a:t>
+            </a:r>
+          </a:p>
+        </p:txBody>
+      </p:sp>
+      <p:sp>
+        <p:nvSpPr>
+          <p:cNvPr id="3" name="TextBox 2"/>
+          <p:cNvSpPr txBox="1"/>
+          <p:nvPr/>
+        </p:nvSpPr>
+        <p:spPr>
+          <a:xfrm>
+            <a:off x="914400" y="1371600"/>
+            <a:ext cx="10058400" cy="5029200"/>
+          </a:xfrm>
+          <a:prstGeom prst="rect">
+            <a:avLst/>
+          </a:prstGeom>
+          <a:noFill/>
+        </p:spPr>
+        <p:txBody>
+          <a:bodyPr wrap="none">
+            <a:spAutoFit/>
+          </a:bodyPr>
+          <a:lstStyle/>
+          <a:p/>
+          <a:p>
+            <a:r>
+              <a:rPr sz="1400">
+                <a:solidFill>
+                  <a:srgbClr val="000000"/>
+                </a:solidFill>
+              </a:rPr>
+              <a:t>int a, b;
+cin &gt;&gt; a &gt;&gt; b;
+cout &lt;&lt; a + b &lt;&lt; endl;</a:t>
+            </a:r>
+          </a:p>
+        </p:txBody>
+      </p:sp>
+    </p:spTree>
+  </p:cSld>
+  <p:clrMapOvr>
+    <a:masterClrMapping/>
+  </p:clrMapOvr>
+</p:sld>
+</file>
+
+<file path=ppt/slides/slide5.xml><?xml version="1.0" encoding="utf-8"?>
+<p:sld xmlns:a="http://schemas.openxmlformats.org/drawingml/2006/main" xmlns:p="http://schemas.openxmlformats.org/presentationml/2006/main" xmlns:r="http://schemas.openxmlformats.org/officeDocument/2006/relationships">
+  <p:cSld>
+    <p:spTree>
+      <p:nvGrpSpPr>
+        <p:cNvPr id="1" name=""/>
+        <p:cNvGrpSpPr/>
+        <p:nvPr/>
+      </p:nvGrpSpPr>
+      <p:grpSpPr/>
+      <p:sp>
+        <p:nvSpPr>
+          <p:cNvPr id="2" name="TextBox 1"/>
+          <p:cNvSpPr txBox="1"/>
+          <p:nvPr/>
+        </p:nvSpPr>
+        <p:spPr>
+          <a:xfrm>
+            <a:off x="914400" y="457200"/>
+            <a:ext cx="10058400" cy="914400"/>
+          </a:xfrm>
+          <a:prstGeom prst="rect">
+            <a:avLst/>
+          </a:prstGeom>
+          <a:noFill/>
+        </p:spPr>
+        <p:txBody>
+          <a:bodyPr wrap="none">
+            <a:spAutoFit/>
+          </a:bodyPr>
+          <a:lstStyle/>
+          <a:p>
+            <a:r>
+              <a:rPr sz="2800" b="1">
+                <a:solidFill>
+                  <a:srgbClr val="8B0000"/>
+                </a:solidFill>
+              </a:rPr>
+              <a:t>Python 代码示例</a:t>
+            </a:r>
+          </a:p>
+        </p:txBody>
+      </p:sp>
+      <p:sp>
+        <p:nvSpPr>
+          <p:cNvPr id="3" name="TextBox 2"/>
+          <p:cNvSpPr txBox="1"/>
+          <p:nvPr/>
+        </p:nvSpPr>
+        <p:spPr>
+          <a:xfrm>
+            <a:off x="914400" y="1371600"/>
+            <a:ext cx="10058400" cy="5029200"/>
+          </a:xfrm>
+          <a:prstGeom prst="rect">
+            <a:avLst/>
+          </a:prstGeom>
+          <a:noFill/>
+        </p:spPr>
+        <p:txBody>
+          <a:bodyPr wrap="none">
+            <a:spAutoFit/>
+          </a:bodyPr>
+          <a:lstStyle/>
+          <a:p/>
+          <a:p>
+            <a:r>
+              <a:rPr sz="1400">
+                <a:solidFill>
+                  <a:srgbClr val="000000"/>
+                </a:solidFill>
+              </a:rPr>
+              <a:t>a, b = map(int, input().split())
+print(a + b)</a:t>
+            </a:r>
+          </a:p>
+        </p:txBody>
+      </p:sp>
+    </p:spTree>
+  </p:cSld>
+  <p:clrMapOvr>
+    <a:masterClrMapping/>
+  </p:clrMapOvr>
+</p:sld>
+</file>
+
+<file path=ppt/slides/slide6.xml><?xml version="1.0" encoding="utf-8"?>
+<p:sld xmlns:a="http://schemas.openxmlformats.org/drawingml/2006/main" xmlns:p="http://schemas.openxmlformats.org/presentationml/2006/main" xmlns:r="http://schemas.openxmlformats.org/officeDocument/2006/relationships">
+  <p:cSld>
+    <p:spTree>
+      <p:nvGrpSpPr>
+        <p:cNvPr id="1" name=""/>
+        <p:cNvGrpSpPr/>
+        <p:nvPr/>
+      </p:nvGrpSpPr>
+      <p:grpSpPr/>
+      <p:sp>
+        <p:nvSpPr>
+          <p:cNvPr id="2" name="TextBox 1"/>
+          <p:cNvSpPr txBox="1"/>
+          <p:nvPr/>
+        </p:nvSpPr>
+        <p:spPr>
+          <a:xfrm>
+            <a:off x="914400" y="457200"/>
+            <a:ext cx="10058400" cy="914400"/>
+          </a:xfrm>
+          <a:prstGeom prst="rect">
+            <a:avLst/>
+          </a:prstGeom>
+          <a:noFill/>
+        </p:spPr>
+        <p:txBody>
+          <a:bodyPr wrap="none">
+            <a:spAutoFit/>
+          </a:bodyPr>
+          <a:lstStyle/>
+          <a:p>
+            <a:r>
+              <a:rPr sz="2800" b="1">
+                <a:solidFill>
+                  <a:srgbClr val="8B0000"/>
+                </a:solidFill>
+              </a:rPr>
+              <a:t>常见错误</a:t>
+            </a:r>
+          </a:p>
+        </p:txBody>
+      </p:sp>
+      <p:sp>
+        <p:nvSpPr>
+          <p:cNvPr id="3" name="TextBox 2"/>
+          <p:cNvSpPr txBox="1"/>
+          <p:nvPr/>
+        </p:nvSpPr>
+        <p:spPr>
+          <a:xfrm>
+            <a:off x="914400" y="1371600"/>
+            <a:ext cx="10058400" cy="5029200"/>
+          </a:xfrm>
+          <a:prstGeom prst="rect">
+            <a:avLst/>
+          </a:prstGeom>
+          <a:noFill/>
+        </p:spPr>
+        <p:txBody>
+          <a:bodyPr wrap="none">
+            <a:spAutoFit/>
+          </a:bodyPr>
+          <a:lstStyle/>
+          <a:p/>
+          <a:p>
+            <a:r>
+              <a:rPr sz="1600">
+                <a:solidFill>
+                  <a:srgbClr val="000000"/>
+                </a:solidFill>
+              </a:rPr>
+              <a:t>忘记 return 0</a:t>
+            </a:r>
+          </a:p>
+          <a:p>
+            <a:r>
+              <a:rPr sz="1600">
+                <a:solidFill>
+                  <a:srgbClr val="000000"/>
+                </a:solidFill>
+              </a:rPr>
+              <a:t>C++整数除法：5/2=1 不是2.5</a:t>
+            </a:r>
+          </a:p>
+          <a:p>
+            <a:r>
+              <a:rPr sz="1600">
+                <a:solidFill>
+                  <a:srgbClr val="000000"/>
+                </a:solidFill>
+              </a:rPr>
+              <a:t>Python的input()返回字符串，需要int()转换</a:t>
+            </a:r>
+          </a:p>
+          <a:p>
+            <a:r>
+              <a:rPr sz="1600">
+                <a:solidFill>
+                  <a:srgbClr val="000000"/>
+                </a:solidFill>
+              </a:rPr>
+              <a:t>scanf需要&amp;取地址，cin不需要</a:t>
+            </a:r>
+          </a:p>
+        </p:txBody>
+      </p:sp>
+    </p:spTree>
+  </p:cSld>
+  <p:clrMapOvr>
+    <a:masterClrMapping/>
+  </p:clrMapOvr>
+</p:sld>
+</file>
+
+<file path=ppt/slides/slide7.xml><?xml version="1.0" encoding="utf-8"?>
+<p:sld xmlns:a="http://schemas.openxmlformats.org/drawingml/2006/main" xmlns:p="http://schemas.openxmlformats.org/presentationml/2006/main" xmlns:r="http://schemas.openxmlformats.org/officeDocument/2006/relationships">
+  <p:cSld>
+    <p:spTree>
+      <p:nvGrpSpPr>
+        <p:cNvPr id="1" name=""/>
+        <p:cNvGrpSpPr/>
+        <p:nvPr/>
+      </p:nvGrpSpPr>
+      <p:grpSpPr/>
+      <p:sp>
+        <p:nvSpPr>
+          <p:cNvPr id="2" name="TextBox 1"/>
+          <p:cNvSpPr txBox="1"/>
+          <p:nvPr/>
+        </p:nvSpPr>
+        <p:spPr>
+          <a:xfrm>
+            <a:off x="914400" y="457200"/>
+            <a:ext cx="10058400" cy="914400"/>
+          </a:xfrm>
+          <a:prstGeom prst="rect">
+            <a:avLst/>
+          </a:prstGeom>
+          <a:noFill/>
+        </p:spPr>
+        <p:txBody>
+          <a:bodyPr wrap="none">
+            <a:spAutoFit/>
+          </a:bodyPr>
+          <a:lstStyle/>
+          <a:p>
+            <a:r>
+              <a:rPr sz="2800" b="1">
+                <a:solidFill>
+                  <a:srgbClr val="8B0000"/>
+                </a:solidFill>
+              </a:rPr>
+              <a:t>练习题目</a:t>
+            </a:r>
+          </a:p>
+        </p:txBody>
+      </p:sp>
+      <p:sp>
+        <p:nvSpPr>
+          <p:cNvPr id="3" name="TextBox 2"/>
+          <p:cNvSpPr txBox="1"/>
+          <p:nvPr/>
+        </p:nvSpPr>
+        <p:spPr>
+          <a:xfrm>
+            <a:off x="914400" y="1371600"/>
+            <a:ext cx="10058400" cy="5029200"/>
+          </a:xfrm>
+          <a:prstGeom prst="rect">
+            <a:avLst/>
+          </a:prstGeom>
+          <a:noFill/>
+        </p:spPr>
+        <p:txBody>
+          <a:bodyPr wrap="none">
+            <a:spAutoFit/>
+          </a:bodyPr>
+          <a:lstStyle/>
+          <a:p/>
+          <a:p>
+            <a:r>
+              <a:rPr sz="1600">
+                <a:solidFill>
+                  <a:srgbClr val="000000"/>
+                </a:solidFill>
+              </a:rPr>
+              <a:t>JD001 铁令求和</a:t>
+            </a:r>
+          </a:p>
+          <a:p>
+            <a:r>
+              <a:rPr sz="1600">
+                <a:solidFill>
+                  <a:srgbClr val="000000"/>
+                </a:solidFill>
+              </a:rPr>
+              <a:t>JD004 集市算账</a:t>
+            </a:r>
+          </a:p>
+          <a:p>
+            <a:r>
+              <a:rPr sz="1600">
+                <a:solidFill>
+                  <a:srgbClr val="000000"/>
+                </a:solidFill>
+              </a:rPr>
+              <a:t>JD009 圆盘开孔</a:t>
+            </a:r>
+          </a:p>
+        </p:txBody>
+      </p:sp>
+    </p:spTree>
+  </p:cSld>
+  <p:clrMapOvr>
+    <a:masterClrMapping/>
+  </p:clrMapOvr>
+</p:sld>
+</file>
+
+<file path=ppt/slides/slide8.xml><?xml version="1.0" encoding="utf-8"?>
+<p:sld xmlns:a="http://schemas.openxmlformats.org/drawingml/2006/main" xmlns:p="http://schemas.openxmlformats.org/presentationml/2006/main" xmlns:r="http://schemas.openxmlformats.org/officeDocument/2006/relationships">
+  <p:cSld>
+    <p:spTree>
+      <p:nvGrpSpPr>
+        <p:cNvPr id="1" name=""/>
+        <p:cNvGrpSpPr/>
+        <p:nvPr/>
+      </p:nvGrpSpPr>
+      <p:grpSpPr/>
+      <p:sp>
+        <p:nvSpPr>
+          <p:cNvPr id="2" name="TextBox 1"/>
+          <p:cNvSpPr txBox="1"/>
+          <p:nvPr/>
+        </p:nvSpPr>
+        <p:spPr>
+          <a:xfrm>
+            <a:off x="914400" y="457200"/>
+            <a:ext cx="10058400" cy="914400"/>
+          </a:xfrm>
+          <a:prstGeom prst="rect">
+            <a:avLst/>
+          </a:prstGeom>
+          <a:noFill/>
+        </p:spPr>
+        <p:txBody>
+          <a:bodyPr wrap="none">
+            <a:spAutoFit/>
+          </a:bodyPr>
+          <a:lstStyle/>
+          <a:p>
+            <a:r>
+              <a:rPr sz="2800" b="1">
+                <a:solidFill>
+                  <a:srgbClr val="8B0000"/>
+                </a:solidFill>
+              </a:rPr>
+              <a:t>本章小结</a:t>
+            </a:r>
+          </a:p>
+        </p:txBody>
+      </p:sp>
+      <p:sp>
+        <p:nvSpPr>
+          <p:cNvPr id="3" name="TextBox 2"/>
+          <p:cNvSpPr txBox="1"/>
+          <p:nvPr/>
+        </p:nvSpPr>
+        <p:spPr>
+          <a:xfrm>
+            <a:off x="914400" y="1371600"/>
+            <a:ext cx="10058400" cy="5029200"/>
+          </a:xfrm>
+          <a:prstGeom prst="rect">
+            <a:avLst/>
+          </a:prstGeom>
+          <a:noFill/>
+        </p:spPr>
+        <p:txBody>
+          <a:bodyPr wrap="none">
+            <a:spAutoFit/>
+          </a:bodyPr>
+          <a:lstStyle/>
+          <a:p/>
+          <a:p>
+            <a:r>
+              <a:rPr sz="1600">
+                <a:solidFill>
+                  <a:srgbClr val="000000"/>
+                </a:solidFill>
+              </a:rPr>
+              <a:t>掌握核心概念</a:t>
+            </a:r>
+          </a:p>
+          <a:p>
+            <a:r>
+              <a:rPr sz="1600">
+                <a:solidFill>
+                  <a:srgbClr val="000000"/>
+                </a:solidFill>
+              </a:rPr>
+              <a:t>多做练习</a:t>
+            </a:r>
+          </a:p>
+          <a:p>
+            <a:r>
+              <a:rPr sz="1600">
+                <a:solidFill>
+                  <a:srgbClr val="000000"/>
+                </a:solidFill>
+              </a:rPr>
+              <a:t>注意边界条件</a:t>
+            </a:r>
+          </a:p>
+          <a:p>
+            <a:r>
+              <a:rPr sz="1600">
+                <a:solidFill>
+                  <a:srgbClr val="000000"/>
+                </a:solidFill>
+              </a:rPr>
+              <a:t>理解算法思想而非死记代码</a:t>
             </a:r>
           </a:p>
         </p:txBody>

--- a/textbook/ppt/chapter01_ppt.pptx
+++ b/textbook/ppt/chapter01_ppt.pptx
@@ -12,7 +12,6 @@
     <p:sldId id="260" r:id="rId11"/>
     <p:sldId id="261" r:id="rId12"/>
     <p:sldId id="262" r:id="rId13"/>
-    <p:sldId id="263" r:id="rId14"/>
   </p:sldIdLst>
   <p:sldSz cx="12188952" cy="6858000" type="screen4x3"/>
   <p:notesSz cx="6858000" cy="9144000"/>
@@ -3124,18 +3123,7 @@
                   <a:srgbClr val="8B0000"/>
                 </a:solidFill>
               </a:rPr>
-              <a:t>第1章 持剑叩门</a:t>
-            </a:r>
-          </a:p>
-          <a:p>
-            <a:pPr algn="ctr"/>
-            <a:r>
-              <a:rPr sz="2400">
-                <a:solidFill>
-                  <a:srgbClr val="6B5D4D"/>
-                </a:solidFill>
-              </a:rPr>
-              <a:t>变量与输入输出</a:t>
+              <a:t>第1章</a:t>
             </a:r>
           </a:p>
         </p:txBody>
@@ -3166,8 +3154,8 @@
         </p:nvSpPr>
         <p:spPr>
           <a:xfrm>
-            <a:off x="914400" y="457200"/>
-            <a:ext cx="10058400" cy="914400"/>
+            <a:off x="457200" y="274320"/>
+            <a:ext cx="10972800" cy="731520"/>
           </a:xfrm>
           <a:prstGeom prst="rect">
             <a:avLst/>
@@ -3181,7 +3169,7 @@
           <a:lstStyle/>
           <a:p>
             <a:r>
-              <a:rPr sz="2800" b="1">
+              <a:rPr sz="2400" b="1">
                 <a:solidFill>
                   <a:srgbClr val="8B0000"/>
                 </a:solidFill>
@@ -3199,8 +3187,8 @@
         </p:nvSpPr>
         <p:spPr>
           <a:xfrm>
-            <a:off x="914400" y="1371600"/>
-            <a:ext cx="10058400" cy="4572000"/>
+            <a:off x="457200" y="1097280"/>
+            <a:ext cx="10972800" cy="5029200"/>
           </a:xfrm>
           <a:prstGeom prst="rect">
             <a:avLst/>
@@ -3215,32 +3203,62 @@
           <a:p/>
           <a:p>
             <a:r>
-              <a:rPr sz="1800"/>
-              <a:t>• 什么是变量（盒子比喻）的基本概念与应用</a:t>
-            </a:r>
-          </a:p>
-          <a:p>
-            <a:r>
-              <a:rPr sz="1800"/>
-              <a:t>• int vs double的基本概念与应用</a:t>
-            </a:r>
-          </a:p>
-          <a:p>
-            <a:r>
-              <a:rPr sz="1800"/>
-              <a:t>• #include 的含义的基本概念与应用</a:t>
-            </a:r>
-          </a:p>
-          <a:p>
-            <a:r>
-              <a:rPr sz="1800"/>
-              <a:t>• cin/cout vs scanf/printf的基本概念与应用</a:t>
-            </a:r>
-          </a:p>
-          <a:p>
-            <a:r>
-              <a:rPr sz="1800"/>
-              <a:t>• Python 的 input/print的基本概念与应用</a:t>
+              <a:rPr sz="1400">
+                <a:solidFill>
+                  <a:srgbClr val="000000"/>
+                </a:solidFill>
+              </a:rPr>
+              <a:t>变量 = 有标签的盒子，存一个值</a:t>
+            </a:r>
+          </a:p>
+          <a:p>
+            <a:r>
+              <a:rPr sz="1400">
+                <a:solidFill>
+                  <a:srgbClr val="000000"/>
+                </a:solidFill>
+              </a:rPr>
+              <a:t>int 存整数（-21亿~21亿），double 存小数（15位精度）</a:t>
+            </a:r>
+          </a:p>
+          <a:p>
+            <a:r>
+              <a:rPr sz="1400">
+                <a:solidFill>
+                  <a:srgbClr val="000000"/>
+                </a:solidFill>
+              </a:rPr>
+              <a:t>#include &lt;iostream&gt; = 从工具箱拿工具</a:t>
+            </a:r>
+          </a:p>
+          <a:p>
+            <a:r>
+              <a:rPr sz="1400">
+                <a:solidFill>
+                  <a:srgbClr val="000000"/>
+                </a:solidFill>
+              </a:rPr>
+              <a:t>using namespace std = 不用每次都写 std::cout</a:t>
+            </a:r>
+          </a:p>
+          <a:p>
+            <a:r>
+              <a:rPr sz="1400">
+                <a:solidFill>
+                  <a:srgbClr val="000000"/>
+                </a:solidFill>
+              </a:rPr>
+              <a:t>cin &gt;&gt; a 从键盘读入，cout &lt;&lt; a 输出到屏幕</a:t>
+            </a:r>
+          </a:p>
+          <a:p>
+            <a:r>
+              <a:rPr sz="1400">
+                <a:solidFill>
+                  <a:srgbClr val="000000"/>
+                </a:solidFill>
+              </a:rPr>
+              <a:t>input() 读一行字符串，print() 输出</a:t>
             </a:r>
           </a:p>
         </p:txBody>
@@ -3271,8 +3289,8 @@
         </p:nvSpPr>
         <p:spPr>
           <a:xfrm>
-            <a:off x="914400" y="457200"/>
-            <a:ext cx="10058400" cy="914400"/>
+            <a:off x="457200" y="274320"/>
+            <a:ext cx="10972800" cy="731520"/>
           </a:xfrm>
           <a:prstGeom prst="rect">
             <a:avLst/>
@@ -3286,12 +3304,12 @@
           <a:lstStyle/>
           <a:p>
             <a:r>
-              <a:rPr sz="2800" b="1">
+              <a:rPr sz="2400" b="1">
                 <a:solidFill>
                   <a:srgbClr val="8B0000"/>
                 </a:solidFill>
               </a:rPr>
-              <a:t>本章概览</a:t>
+              <a:t>C++ 代码示例</a:t>
             </a:r>
           </a:p>
         </p:txBody>
@@ -3304,8 +3322,8 @@
         </p:nvSpPr>
         <p:spPr>
           <a:xfrm>
-            <a:off x="914400" y="1371600"/>
-            <a:ext cx="10058400" cy="5029200"/>
+            <a:off x="457200" y="1097280"/>
+            <a:ext cx="10972800" cy="5029200"/>
           </a:xfrm>
           <a:prstGeom prst="rect">
             <a:avLst/>
@@ -3320,42 +3338,19 @@
           <a:p/>
           <a:p>
             <a:r>
-              <a:rPr sz="1600">
+              <a:rPr sz="1200">
                 <a:solidFill>
                   <a:srgbClr val="000000"/>
                 </a:solidFill>
               </a:rPr>
-              <a:t>变量 = 盒子，int装整数，double装小数</a:t>
-            </a:r>
-          </a:p>
-          <a:p>
-            <a:r>
-              <a:rPr sz="1600">
-                <a:solidFill>
-                  <a:srgbClr val="000000"/>
-                </a:solidFill>
-              </a:rPr>
-              <a:t>#include = 工具箱，using namespace std = 快捷方式</a:t>
-            </a:r>
-          </a:p>
-          <a:p>
-            <a:r>
-              <a:rPr sz="1600">
-                <a:solidFill>
-                  <a:srgbClr val="000000"/>
-                </a:solidFill>
-              </a:rPr>
-              <a:t>cin/cout 是C++的输入输出</a:t>
-            </a:r>
-          </a:p>
-          <a:p>
-            <a:r>
-              <a:rPr sz="1600">
-                <a:solidFill>
-                  <a:srgbClr val="000000"/>
-                </a:solidFill>
-              </a:rPr>
-              <a:t>input()/print() 是Python的输入输出</a:t>
+              <a:t>#include &lt;iostream&gt;
+using namespace std;
+int main() {
+    int a, b;
+    cin &gt;&gt; a &gt;&gt; b;       // 读入两个整数
+    cout &lt;&lt; a + b &lt;&lt; endl; // 输出它们的和
+    return 0;
+}</a:t>
             </a:r>
           </a:p>
         </p:txBody>
@@ -3386,8 +3381,8 @@
         </p:nvSpPr>
         <p:spPr>
           <a:xfrm>
-            <a:off x="914400" y="457200"/>
-            <a:ext cx="10058400" cy="914400"/>
+            <a:off x="457200" y="274320"/>
+            <a:ext cx="10972800" cy="731520"/>
           </a:xfrm>
           <a:prstGeom prst="rect">
             <a:avLst/>
@@ -3401,12 +3396,12 @@
           <a:lstStyle/>
           <a:p>
             <a:r>
-              <a:rPr sz="2800" b="1">
+              <a:rPr sz="2400" b="1">
                 <a:solidFill>
                   <a:srgbClr val="8B0000"/>
                 </a:solidFill>
               </a:rPr>
-              <a:t>C++ 代码示例</a:t>
+              <a:t>Python 代码示例</a:t>
             </a:r>
           </a:p>
         </p:txBody>
@@ -3419,8 +3414,8 @@
         </p:nvSpPr>
         <p:spPr>
           <a:xfrm>
-            <a:off x="914400" y="1371600"/>
-            <a:ext cx="10058400" cy="5029200"/>
+            <a:off x="457200" y="1097280"/>
+            <a:ext cx="10972800" cy="5029200"/>
           </a:xfrm>
           <a:prstGeom prst="rect">
             <a:avLst/>
@@ -3435,14 +3430,16 @@
           <a:p/>
           <a:p>
             <a:r>
-              <a:rPr sz="1400">
+              <a:rPr sz="1200">
                 <a:solidFill>
                   <a:srgbClr val="000000"/>
                 </a:solidFill>
               </a:rPr>
-              <a:t>int a, b;
-cin &gt;&gt; a &gt;&gt; b;
-cout &lt;&lt; a + b &lt;&lt; endl;</a:t>
+              <a:t>a, b = map(int, input().split())
+# input() 读一行字符串
+# split() 按空格分成列表
+# map(int, ...) 转成整数
+print(a + b)</a:t>
             </a:r>
           </a:p>
         </p:txBody>
@@ -3473,8 +3470,8 @@
         </p:nvSpPr>
         <p:spPr>
           <a:xfrm>
-            <a:off x="914400" y="457200"/>
-            <a:ext cx="10058400" cy="914400"/>
+            <a:off x="457200" y="274320"/>
+            <a:ext cx="10972800" cy="731520"/>
           </a:xfrm>
           <a:prstGeom prst="rect">
             <a:avLst/>
@@ -3488,12 +3485,12 @@
           <a:lstStyle/>
           <a:p>
             <a:r>
-              <a:rPr sz="2800" b="1">
+              <a:rPr sz="2400" b="1">
                 <a:solidFill>
                   <a:srgbClr val="8B0000"/>
                 </a:solidFill>
               </a:rPr>
-              <a:t>Python 代码示例</a:t>
+              <a:t>常见错误</a:t>
             </a:r>
           </a:p>
         </p:txBody>
@@ -3506,8 +3503,8 @@
         </p:nvSpPr>
         <p:spPr>
           <a:xfrm>
-            <a:off x="914400" y="1371600"/>
-            <a:ext cx="10058400" cy="5029200"/>
+            <a:off x="457200" y="1097280"/>
+            <a:ext cx="10972800" cy="5029200"/>
           </a:xfrm>
           <a:prstGeom prst="rect">
             <a:avLst/>
@@ -3527,8 +3524,47 @@
                   <a:srgbClr val="000000"/>
                 </a:solidFill>
               </a:rPr>
-              <a:t>a, b = map(int, input().split())
-print(a + b)</a:t>
+              <a:t>忘记 return 0：程序可能返回随机值</a:t>
+            </a:r>
+          </a:p>
+          <a:p>
+            <a:r>
+              <a:rPr sz="1400">
+                <a:solidFill>
+                  <a:srgbClr val="000000"/>
+                </a:solidFill>
+              </a:rPr>
+              <a:t>C++整数除法 5/2=1 不是 2.5！要用 5.0/2</a:t>
+            </a:r>
+          </a:p>
+          <a:p>
+            <a:r>
+              <a:rPr sz="1400">
+                <a:solidFill>
+                  <a:srgbClr val="000000"/>
+                </a:solidFill>
+              </a:rPr>
+              <a:t>Python的 input() 返回字符串，必须 int() 转换</a:t>
+            </a:r>
+          </a:p>
+          <a:p>
+            <a:r>
+              <a:rPr sz="1400">
+                <a:solidFill>
+                  <a:srgbClr val="000000"/>
+                </a:solidFill>
+              </a:rPr>
+              <a:t>scanf需要 &amp;取地址：scanf("%d", &amp;a) 而 cin &gt;&gt; a 不需要</a:t>
+            </a:r>
+          </a:p>
+          <a:p>
+            <a:r>
+              <a:rPr sz="1400">
+                <a:solidFill>
+                  <a:srgbClr val="000000"/>
+                </a:solidFill>
+              </a:rPr>
+              <a:t>浮点数用 %lf 格式符，整数用 %d</a:t>
             </a:r>
           </a:p>
         </p:txBody>
@@ -3559,8 +3595,8 @@
         </p:nvSpPr>
         <p:spPr>
           <a:xfrm>
-            <a:off x="914400" y="457200"/>
-            <a:ext cx="10058400" cy="914400"/>
+            <a:off x="457200" y="274320"/>
+            <a:ext cx="10972800" cy="731520"/>
           </a:xfrm>
           <a:prstGeom prst="rect">
             <a:avLst/>
@@ -3574,12 +3610,12 @@
           <a:lstStyle/>
           <a:p>
             <a:r>
-              <a:rPr sz="2800" b="1">
+              <a:rPr sz="2400" b="1">
                 <a:solidFill>
                   <a:srgbClr val="8B0000"/>
                 </a:solidFill>
               </a:rPr>
-              <a:t>常见错误</a:t>
+              <a:t>练习题目</a:t>
             </a:r>
           </a:p>
         </p:txBody>
@@ -3592,8 +3628,8 @@
         </p:nvSpPr>
         <p:spPr>
           <a:xfrm>
-            <a:off x="914400" y="1371600"/>
-            <a:ext cx="10058400" cy="5029200"/>
+            <a:off x="457200" y="1097280"/>
+            <a:ext cx="10972800" cy="5029200"/>
           </a:xfrm>
           <a:prstGeom prst="rect">
             <a:avLst/>
@@ -3608,42 +3644,32 @@
           <a:p/>
           <a:p>
             <a:r>
-              <a:rPr sz="1600">
+              <a:rPr sz="1400">
                 <a:solidFill>
                   <a:srgbClr val="000000"/>
                 </a:solidFill>
               </a:rPr>
-              <a:t>忘记 return 0</a:t>
-            </a:r>
-          </a:p>
-          <a:p>
-            <a:r>
-              <a:rPr sz="1600">
+              <a:t>JD001 铁令求和 - 两个整数相加 (Easy)</a:t>
+            </a:r>
+          </a:p>
+          <a:p>
+            <a:r>
+              <a:rPr sz="1400">
                 <a:solidFill>
                   <a:srgbClr val="000000"/>
                 </a:solidFill>
               </a:rPr>
-              <a:t>C++整数除法：5/2=1 不是2.5</a:t>
-            </a:r>
-          </a:p>
-          <a:p>
-            <a:r>
-              <a:rPr sz="1600">
+              <a:t>JD004 集市算账 - 混合运算 (Easy)</a:t>
+            </a:r>
+          </a:p>
+          <a:p>
+            <a:r>
+              <a:rPr sz="1400">
                 <a:solidFill>
                   <a:srgbClr val="000000"/>
                 </a:solidFill>
               </a:rPr>
-              <a:t>Python的input()返回字符串，需要int()转换</a:t>
-            </a:r>
-          </a:p>
-          <a:p>
-            <a:r>
-              <a:rPr sz="1600">
-                <a:solidFill>
-                  <a:srgbClr val="000000"/>
-                </a:solidFill>
-              </a:rPr>
-              <a:t>scanf需要&amp;取地址，cin不需要</a:t>
+              <a:t>JD009 圆盘开孔 - 浮点数运算 (Medium)</a:t>
             </a:r>
           </a:p>
         </p:txBody>
@@ -3674,8 +3700,8 @@
         </p:nvSpPr>
         <p:spPr>
           <a:xfrm>
-            <a:off x="914400" y="457200"/>
-            <a:ext cx="10058400" cy="914400"/>
+            <a:off x="457200" y="274320"/>
+            <a:ext cx="10972800" cy="731520"/>
           </a:xfrm>
           <a:prstGeom prst="rect">
             <a:avLst/>
@@ -3689,12 +3715,12 @@
           <a:lstStyle/>
           <a:p>
             <a:r>
-              <a:rPr sz="2800" b="1">
+              <a:rPr sz="2400" b="1">
                 <a:solidFill>
                   <a:srgbClr val="8B0000"/>
                 </a:solidFill>
               </a:rPr>
-              <a:t>练习题目</a:t>
+              <a:t>本章小结</a:t>
             </a:r>
           </a:p>
         </p:txBody>
@@ -3707,8 +3733,8 @@
         </p:nvSpPr>
         <p:spPr>
           <a:xfrm>
-            <a:off x="914400" y="1371600"/>
-            <a:ext cx="10058400" cy="5029200"/>
+            <a:off x="457200" y="1097280"/>
+            <a:ext cx="10972800" cy="5029200"/>
           </a:xfrm>
           <a:prstGeom prst="rect">
             <a:avLst/>
@@ -3723,147 +3749,42 @@
           <a:p/>
           <a:p>
             <a:r>
-              <a:rPr sz="1600">
+              <a:rPr sz="1400">
                 <a:solidFill>
                   <a:srgbClr val="000000"/>
                 </a:solidFill>
               </a:rPr>
-              <a:t>JD001 铁令求和</a:t>
-            </a:r>
-          </a:p>
-          <a:p>
-            <a:r>
-              <a:rPr sz="1600">
+              <a:t>本章学习了第1章的核心概念</a:t>
+            </a:r>
+          </a:p>
+          <a:p>
+            <a:r>
+              <a:rPr sz="1400">
                 <a:solidFill>
                   <a:srgbClr val="000000"/>
                 </a:solidFill>
               </a:rPr>
-              <a:t>JD004 集市算账</a:t>
-            </a:r>
-          </a:p>
-          <a:p>
-            <a:r>
-              <a:rPr sz="1600">
+              <a:t>多做练习是掌握算法的关键</a:t>
+            </a:r>
+          </a:p>
+          <a:p>
+            <a:r>
+              <a:rPr sz="1400">
                 <a:solidFill>
                   <a:srgbClr val="000000"/>
                 </a:solidFill>
               </a:rPr>
-              <a:t>JD009 圆盘开孔</a:t>
-            </a:r>
-          </a:p>
-        </p:txBody>
-      </p:sp>
-    </p:spTree>
-  </p:cSld>
-  <p:clrMapOvr>
-    <a:masterClrMapping/>
-  </p:clrMapOvr>
-</p:sld>
-</file>
-
-<file path=ppt/slides/slide8.xml><?xml version="1.0" encoding="utf-8"?>
-<p:sld xmlns:a="http://schemas.openxmlformats.org/drawingml/2006/main" xmlns:p="http://schemas.openxmlformats.org/presentationml/2006/main" xmlns:r="http://schemas.openxmlformats.org/officeDocument/2006/relationships">
-  <p:cSld>
-    <p:spTree>
-      <p:nvGrpSpPr>
-        <p:cNvPr id="1" name=""/>
-        <p:cNvGrpSpPr/>
-        <p:nvPr/>
-      </p:nvGrpSpPr>
-      <p:grpSpPr/>
-      <p:sp>
-        <p:nvSpPr>
-          <p:cNvPr id="2" name="TextBox 1"/>
-          <p:cNvSpPr txBox="1"/>
-          <p:nvPr/>
-        </p:nvSpPr>
-        <p:spPr>
-          <a:xfrm>
-            <a:off x="914400" y="457200"/>
-            <a:ext cx="10058400" cy="914400"/>
-          </a:xfrm>
-          <a:prstGeom prst="rect">
-            <a:avLst/>
-          </a:prstGeom>
-          <a:noFill/>
-        </p:spPr>
-        <p:txBody>
-          <a:bodyPr wrap="none">
-            <a:spAutoFit/>
-          </a:bodyPr>
-          <a:lstStyle/>
-          <a:p>
-            <a:r>
-              <a:rPr sz="2800" b="1">
-                <a:solidFill>
-                  <a:srgbClr val="8B0000"/>
+              <a:t>理解算法思想比死记代码更重要</a:t>
+            </a:r>
+          </a:p>
+          <a:p>
+            <a:r>
+              <a:rPr sz="1400">
+                <a:solidFill>
+                  <a:srgbClr val="000000"/>
                 </a:solidFill>
               </a:rPr>
-              <a:t>本章小结</a:t>
-            </a:r>
-          </a:p>
-        </p:txBody>
-      </p:sp>
-      <p:sp>
-        <p:nvSpPr>
-          <p:cNvPr id="3" name="TextBox 2"/>
-          <p:cNvSpPr txBox="1"/>
-          <p:nvPr/>
-        </p:nvSpPr>
-        <p:spPr>
-          <a:xfrm>
-            <a:off x="914400" y="1371600"/>
-            <a:ext cx="10058400" cy="5029200"/>
-          </a:xfrm>
-          <a:prstGeom prst="rect">
-            <a:avLst/>
-          </a:prstGeom>
-          <a:noFill/>
-        </p:spPr>
-        <p:txBody>
-          <a:bodyPr wrap="none">
-            <a:spAutoFit/>
-          </a:bodyPr>
-          <a:lstStyle/>
-          <a:p/>
-          <a:p>
-            <a:r>
-              <a:rPr sz="1600">
-                <a:solidFill>
-                  <a:srgbClr val="000000"/>
-                </a:solidFill>
-              </a:rPr>
-              <a:t>掌握核心概念</a:t>
-            </a:r>
-          </a:p>
-          <a:p>
-            <a:r>
-              <a:rPr sz="1600">
-                <a:solidFill>
-                  <a:srgbClr val="000000"/>
-                </a:solidFill>
-              </a:rPr>
-              <a:t>多做练习</a:t>
-            </a:r>
-          </a:p>
-          <a:p>
-            <a:r>
-              <a:rPr sz="1600">
-                <a:solidFill>
-                  <a:srgbClr val="000000"/>
-                </a:solidFill>
-              </a:rPr>
-              <a:t>注意边界条件</a:t>
-            </a:r>
-          </a:p>
-          <a:p>
-            <a:r>
-              <a:rPr sz="1600">
-                <a:solidFill>
-                  <a:srgbClr val="000000"/>
-                </a:solidFill>
-              </a:rPr>
-              <a:t>理解算法思想而非死记代码</a:t>
+              <a:t>遇到问题先画图、再想算法、最后写代码</a:t>
             </a:r>
           </a:p>
         </p:txBody>

--- a/textbook/ppt/chapter01_ppt.pptx
+++ b/textbook/ppt/chapter01_ppt.pptx
@@ -12,6 +12,7 @@
     <p:sldId id="260" r:id="rId11"/>
     <p:sldId id="261" r:id="rId12"/>
     <p:sldId id="262" r:id="rId13"/>
+    <p:sldId id="263" r:id="rId14"/>
   </p:sldIdLst>
   <p:sldSz cx="12188952" cy="6858000" type="screen4x3"/>
   <p:notesSz cx="6858000" cy="9144000"/>
@@ -3669,7 +3670,7 @@
                   <a:srgbClr val="000000"/>
                 </a:solidFill>
               </a:rPr>
-              <a:t>JD009 圆盘开孔 - 浮点数运算 (Medium)</a:t>
+              <a:t>JD009 铁球体积 - 浮点数运算 (Medium)</a:t>
             </a:r>
           </a:p>
         </p:txBody>
@@ -3785,6 +3786,91 @@
                 </a:solidFill>
               </a:rPr>
               <a:t>遇到问题先画图、再想算法、最后写代码</a:t>
+            </a:r>
+          </a:p>
+        </p:txBody>
+      </p:sp>
+    </p:spTree>
+  </p:cSld>
+  <p:clrMapOvr>
+    <a:masterClrMapping/>
+  </p:clrMapOvr>
+</p:sld>
+</file>
+
+<file path=ppt/slides/slide8.xml><?xml version="1.0" encoding="utf-8"?>
+<p:sld xmlns:a="http://schemas.openxmlformats.org/drawingml/2006/main" xmlns:p="http://schemas.openxmlformats.org/presentationml/2006/main" xmlns:r="http://schemas.openxmlformats.org/officeDocument/2006/relationships">
+  <p:cSld>
+    <p:spTree>
+      <p:nvGrpSpPr>
+        <p:cNvPr id="1" name=""/>
+        <p:cNvGrpSpPr/>
+        <p:nvPr/>
+      </p:nvGrpSpPr>
+      <p:grpSpPr/>
+      <p:sp>
+        <p:nvSpPr>
+          <p:cNvPr id="2" name="TextBox 1"/>
+          <p:cNvSpPr txBox="1"/>
+          <p:nvPr/>
+        </p:nvSpPr>
+        <p:spPr>
+          <a:xfrm>
+            <a:off x="457200" y="274320"/>
+            <a:ext cx="10972800" cy="731520"/>
+          </a:xfrm>
+          <a:prstGeom prst="rect">
+            <a:avLst/>
+          </a:prstGeom>
+          <a:noFill/>
+        </p:spPr>
+        <p:txBody>
+          <a:bodyPr wrap="none">
+            <a:spAutoFit/>
+          </a:bodyPr>
+          <a:lstStyle/>
+          <a:p>
+            <a:r>
+              <a:rPr sz="2400" b="1">
+                <a:solidFill>
+                  <a:srgbClr val="8B0000"/>
+                </a:solidFill>
+              </a:rPr>
+              <a:t>本章概览</a:t>
+            </a:r>
+          </a:p>
+        </p:txBody>
+      </p:sp>
+      <p:sp>
+        <p:nvSpPr>
+          <p:cNvPr id="3" name="TextBox 2"/>
+          <p:cNvSpPr txBox="1"/>
+          <p:nvPr/>
+        </p:nvSpPr>
+        <p:spPr>
+          <a:xfrm>
+            <a:off x="457200" y="1097280"/>
+            <a:ext cx="10972800" cy="5029200"/>
+          </a:xfrm>
+          <a:prstGeom prst="rect">
+            <a:avLst/>
+          </a:prstGeom>
+          <a:noFill/>
+        </p:spPr>
+        <p:txBody>
+          <a:bodyPr wrap="none">
+            <a:spAutoFit/>
+          </a:bodyPr>
+          <a:lstStyle/>
+          <a:p/>
+          <a:p>
+            <a:r>
+              <a:rPr sz="1600">
+                <a:solidFill>
+                  <a:srgbClr val="000000"/>
+                </a:solidFill>
+              </a:rPr>
+              <a:t>本章将学习变量、数据类型和输入输出——这是所有程序的基础。掌握如何读入数据、计算、输出结果。</a:t>
             </a:r>
           </a:p>
         </p:txBody>

--- a/textbook/ppt/chapter01_ppt.pptx
+++ b/textbook/ppt/chapter01_ppt.pptx
@@ -13,6 +13,7 @@
     <p:sldId id="261" r:id="rId12"/>
     <p:sldId id="262" r:id="rId13"/>
     <p:sldId id="263" r:id="rId14"/>
+    <p:sldId id="264" r:id="rId15"/>
   </p:sldIdLst>
   <p:sldSz cx="12188952" cy="6858000" type="screen4x3"/>
   <p:notesSz cx="6858000" cy="9144000"/>
@@ -3755,7 +3756,7 @@
                   <a:srgbClr val="000000"/>
                 </a:solidFill>
               </a:rPr>
-              <a:t>本章学习了第1章的核心概念</a:t>
+              <a:t/>
             </a:r>
           </a:p>
           <a:p>
@@ -3765,7 +3766,7 @@
                   <a:srgbClr val="000000"/>
                 </a:solidFill>
               </a:rPr>
-              <a:t>多做练习是掌握算法的关键</a:t>
+              <a:t/>
             </a:r>
           </a:p>
           <a:p>
@@ -3775,7 +3776,7 @@
                   <a:srgbClr val="000000"/>
                 </a:solidFill>
               </a:rPr>
-              <a:t>理解算法思想比死记代码更重要</a:t>
+              <a:t/>
             </a:r>
           </a:p>
           <a:p>
@@ -3785,7 +3786,7 @@
                   <a:srgbClr val="000000"/>
                 </a:solidFill>
               </a:rPr>
-              <a:t>遇到问题先画图、再想算法、最后写代码</a:t>
+              <a:t/>
             </a:r>
           </a:p>
         </p:txBody>
@@ -3871,6 +3872,121 @@
                 </a:solidFill>
               </a:rPr>
               <a:t>本章将学习变量、数据类型和输入输出——这是所有程序的基础。掌握如何读入数据、计算、输出结果。</a:t>
+            </a:r>
+          </a:p>
+        </p:txBody>
+      </p:sp>
+    </p:spTree>
+  </p:cSld>
+  <p:clrMapOvr>
+    <a:masterClrMapping/>
+  </p:clrMapOvr>
+</p:sld>
+</file>
+
+<file path=ppt/slides/slide9.xml><?xml version="1.0" encoding="utf-8"?>
+<p:sld xmlns:a="http://schemas.openxmlformats.org/drawingml/2006/main" xmlns:p="http://schemas.openxmlformats.org/presentationml/2006/main" xmlns:r="http://schemas.openxmlformats.org/officeDocument/2006/relationships">
+  <p:cSld>
+    <p:spTree>
+      <p:nvGrpSpPr>
+        <p:cNvPr id="1" name=""/>
+        <p:cNvGrpSpPr/>
+        <p:nvPr/>
+      </p:nvGrpSpPr>
+      <p:grpSpPr/>
+      <p:sp>
+        <p:nvSpPr>
+          <p:cNvPr id="2" name="TextBox 1"/>
+          <p:cNvSpPr txBox="1"/>
+          <p:nvPr/>
+        </p:nvSpPr>
+        <p:spPr>
+          <a:xfrm>
+            <a:off x="457200" y="274320"/>
+            <a:ext cx="10972800" cy="731520"/>
+          </a:xfrm>
+          <a:prstGeom prst="rect">
+            <a:avLst/>
+          </a:prstGeom>
+          <a:noFill/>
+        </p:spPr>
+        <p:txBody>
+          <a:bodyPr wrap="none">
+            <a:spAutoFit/>
+          </a:bodyPr>
+          <a:lstStyle/>
+          <a:p>
+            <a:r>
+              <a:rPr sz="2400" b="1">
+                <a:solidFill>
+                  <a:srgbClr val="8B0000"/>
+                </a:solidFill>
+              </a:rPr>
+              <a:t>第1章 核心要点</a:t>
+            </a:r>
+          </a:p>
+        </p:txBody>
+      </p:sp>
+      <p:sp>
+        <p:nvSpPr>
+          <p:cNvPr id="3" name="TextBox 2"/>
+          <p:cNvSpPr txBox="1"/>
+          <p:nvPr/>
+        </p:nvSpPr>
+        <p:spPr>
+          <a:xfrm>
+            <a:off x="457200" y="1097280"/>
+            <a:ext cx="10972800" cy="5029200"/>
+          </a:xfrm>
+          <a:prstGeom prst="rect">
+            <a:avLst/>
+          </a:prstGeom>
+          <a:noFill/>
+        </p:spPr>
+        <p:txBody>
+          <a:bodyPr wrap="none">
+            <a:spAutoFit/>
+          </a:bodyPr>
+          <a:lstStyle/>
+          <a:p/>
+          <a:p>
+            <a:r>
+              <a:rPr sz="1600">
+                <a:solidFill>
+                  <a:srgbClr val="000000"/>
+                </a:solidFill>
+              </a:rPr>
+              <a:t>• cin/cout 和 scanf/printf 的区别与选择</a:t>
+            </a:r>
+          </a:p>
+          <a:p>
+            <a:r>
+              <a:rPr sz="1600">
+                <a:solidFill>
+                  <a:srgbClr val="000000"/>
+                </a:solidFill>
+              </a:rPr>
+              <a:t>• int/double 数据类型的选择</a:t>
+            </a:r>
+          </a:p>
+          <a:p>
+            <a:r>
+              <a:rPr sz="1600">
+                <a:solidFill>
+                  <a:srgbClr val="000000"/>
+                </a:solidFill>
+              </a:rPr>
+              <a:t>• return 0 的含义</a:t>
+            </a:r>
+          </a:p>
+          <a:p>
+            <a:r>
+              <a:rPr sz="1600">
+                <a:solidFill>
+                  <a:srgbClr val="000000"/>
+                </a:solidFill>
+              </a:rPr>
+              <a:t>• Python 的 input()/print() 基本用法</a:t>
             </a:r>
           </a:p>
         </p:txBody>
